--- a/edities/books34-v3/books/book-4/chapters/4.3/paragraph-pdfs/4.3.5 Gemengde opgaven arbeidsmarkt – presentatie.pptx
+++ b/edities/books34-v3/books/book-4/chapters/4.3/paragraph-pdfs/4.3.5 Gemengde opgaven arbeidsmarkt – presentatie.pptx
@@ -510,25 +510,25 @@
           <a:p xmlns:a="http://schemas.openxmlformats.org/drawingml/2006/main">
             <a:r>
               <a:rPr sz="1400"/>
-              <a:t>Bron: Boek 4, books34-v3, broncommit e734532a42b27732ac25ce990fc9448b12309d28. Gedrukte boekpagina 150: start. Opgave 40: bronnen p.152 en vragen p.153. https://github.com/meijer1973/4veco-lessen/blob/e734532a42b27732ac25ce990fc9448b12309d28/edities/books34-v3/books/book-4/output/Boek_4_Compleet_v3.pdf</a:t>
-            </a:r>
-          </a:p>
-          <a:p xmlns:a="http://schemas.openxmlformats.org/drawingml/2006/main">
-            <a:r>
-              <a:rPr sz="1400"/>
-              <a:t>Manuscript: https://github.com/meijer1973/4veco-lessen/blob/e734532a42b27732ac25ce990fc9448b12309d28/edities/books34-v3/books/book-4/chapters/4.3/4.3.5%20manuscript.md</a:t>
-            </a:r>
-          </a:p>
-          <a:p xmlns:a="http://schemas.openxmlformats.org/drawingml/2006/main">
-            <a:r>
-              <a:rPr sz="1400"/>
-              <a:t>Antwoordmodel: https://github.com/meijer1973/4veco-lessen/blob/e734532a42b27732ac25ce990fc9448b12309d28/edities/books34-v3/books/book-4/chapters/4.3/Antwoorden.md</a:t>
-            </a:r>
-          </a:p>
-          <a:p xmlns:a="http://schemas.openxmlformats.org/drawingml/2006/main">
-            <a:r>
-              <a:rPr sz="1400"/>
-              <a:t>Docenteninformatie: https://github.com/meijer1973/4veco-lessen/blob/e734532a42b27732ac25ce990fc9448b12309d28/edities/books34-v3/books/book-4/chapters/4.3/Docenteninformatie.md</a:t>
+              <a:t>Bron: Boek 4, books34-v3, broncommit 0356afb6cac2dd43adbe9f63b872aaf423efc914. Gedrukte boekpagina 150: start. Opgave 40: bronnen p.152 en vragen p.153. https://github.com/meijer1973/4veco-lessen/blob/0356afb6cac2dd43adbe9f63b872aaf423efc914/edities/books34-v3/books/book-4/output/Boek_4_Compleet_v3.pdf</a:t>
+            </a:r>
+          </a:p>
+          <a:p xmlns:a="http://schemas.openxmlformats.org/drawingml/2006/main">
+            <a:r>
+              <a:rPr sz="1400"/>
+              <a:t>Manuscript: https://github.com/meijer1973/4veco-lessen/blob/0356afb6cac2dd43adbe9f63b872aaf423efc914/edities/books34-v3/books/book-4/chapters/4.3/4.3.5%20manuscript.md</a:t>
+            </a:r>
+          </a:p>
+          <a:p xmlns:a="http://schemas.openxmlformats.org/drawingml/2006/main">
+            <a:r>
+              <a:rPr sz="1400"/>
+              <a:t>Antwoordmodel: https://github.com/meijer1973/4veco-lessen/blob/0356afb6cac2dd43adbe9f63b872aaf423efc914/edities/books34-v3/books/book-4/chapters/4.3/Antwoorden.md</a:t>
+            </a:r>
+          </a:p>
+          <a:p xmlns:a="http://schemas.openxmlformats.org/drawingml/2006/main">
+            <a:r>
+              <a:rPr sz="1400"/>
+              <a:t>Docenteninformatie: https://github.com/meijer1973/4veco-lessen/blob/0356afb6cac2dd43adbe9f63b872aaf423efc914/edities/books34-v3/books/book-4/chapters/4.3/Docenteninformatie.md</a:t>
             </a:r>
           </a:p>
           <a:p xmlns:a="http://schemas.openxmlformats.org/drawingml/2006/main">
@@ -653,25 +653,25 @@
           <a:p xmlns:a="http://schemas.openxmlformats.org/drawingml/2006/main">
             <a:r>
               <a:rPr sz="1400"/>
-              <a:t>Bron: Boek 4, books34-v3, broncommit e734532a42b27732ac25ce990fc9448b12309d28. Gedrukte boekpagina’s 152–153 (hoofdstukpagina’s 40–41). https://github.com/meijer1973/4veco-lessen/blob/e734532a42b27732ac25ce990fc9448b12309d28/edities/books34-v3/books/book-4/output/Boek_4_Compleet_v3.pdf</a:t>
-            </a:r>
-          </a:p>
-          <a:p xmlns:a="http://schemas.openxmlformats.org/drawingml/2006/main">
-            <a:r>
-              <a:rPr sz="1400"/>
-              <a:t>Manuscript: https://github.com/meijer1973/4veco-lessen/blob/e734532a42b27732ac25ce990fc9448b12309d28/edities/books34-v3/books/book-4/chapters/4.3/4.3.5%20manuscript.md</a:t>
-            </a:r>
-          </a:p>
-          <a:p xmlns:a="http://schemas.openxmlformats.org/drawingml/2006/main">
-            <a:r>
-              <a:rPr sz="1400"/>
-              <a:t>Antwoordmodel: https://github.com/meijer1973/4veco-lessen/blob/e734532a42b27732ac25ce990fc9448b12309d28/edities/books34-v3/books/book-4/chapters/4.3/Antwoorden.md</a:t>
-            </a:r>
-          </a:p>
-          <a:p xmlns:a="http://schemas.openxmlformats.org/drawingml/2006/main">
-            <a:r>
-              <a:rPr sz="1400"/>
-              <a:t>Docenteninformatie: https://github.com/meijer1973/4veco-lessen/blob/e734532a42b27732ac25ce990fc9448b12309d28/edities/books34-v3/books/book-4/chapters/4.3/Docenteninformatie.md</a:t>
+              <a:t>Bron: Boek 4, books34-v3, broncommit 0356afb6cac2dd43adbe9f63b872aaf423efc914. Gedrukte boekpagina’s 152–153 (hoofdstukpagina’s 40–41). https://github.com/meijer1973/4veco-lessen/blob/0356afb6cac2dd43adbe9f63b872aaf423efc914/edities/books34-v3/books/book-4/output/Boek_4_Compleet_v3.pdf</a:t>
+            </a:r>
+          </a:p>
+          <a:p xmlns:a="http://schemas.openxmlformats.org/drawingml/2006/main">
+            <a:r>
+              <a:rPr sz="1400"/>
+              <a:t>Manuscript: https://github.com/meijer1973/4veco-lessen/blob/0356afb6cac2dd43adbe9f63b872aaf423efc914/edities/books34-v3/books/book-4/chapters/4.3/4.3.5%20manuscript.md</a:t>
+            </a:r>
+          </a:p>
+          <a:p xmlns:a="http://schemas.openxmlformats.org/drawingml/2006/main">
+            <a:r>
+              <a:rPr sz="1400"/>
+              <a:t>Antwoordmodel: https://github.com/meijer1973/4veco-lessen/blob/0356afb6cac2dd43adbe9f63b872aaf423efc914/edities/books34-v3/books/book-4/chapters/4.3/Antwoorden.md</a:t>
+            </a:r>
+          </a:p>
+          <a:p xmlns:a="http://schemas.openxmlformats.org/drawingml/2006/main">
+            <a:r>
+              <a:rPr sz="1400"/>
+              <a:t>Docenteninformatie: https://github.com/meijer1973/4veco-lessen/blob/0356afb6cac2dd43adbe9f63b872aaf423efc914/edities/books34-v3/books/book-4/chapters/4.3/Docenteninformatie.md</a:t>
             </a:r>
           </a:p>
           <a:p xmlns:a="http://schemas.openxmlformats.org/drawingml/2006/main">
@@ -796,25 +796,25 @@
           <a:p xmlns:a="http://schemas.openxmlformats.org/drawingml/2006/main">
             <a:r>
               <a:rPr sz="1400"/>
-              <a:t>Bron: Boek 4, books34-v3, broncommit e734532a42b27732ac25ce990fc9448b12309d28. Gedrukte boekpagina’s 152–153 (hoofdstukpagina’s 40–41). https://github.com/meijer1973/4veco-lessen/blob/e734532a42b27732ac25ce990fc9448b12309d28/edities/books34-v3/books/book-4/output/Boek_4_Compleet_v3.pdf</a:t>
-            </a:r>
-          </a:p>
-          <a:p xmlns:a="http://schemas.openxmlformats.org/drawingml/2006/main">
-            <a:r>
-              <a:rPr sz="1400"/>
-              <a:t>Manuscript: https://github.com/meijer1973/4veco-lessen/blob/e734532a42b27732ac25ce990fc9448b12309d28/edities/books34-v3/books/book-4/chapters/4.3/4.3.5%20manuscript.md</a:t>
-            </a:r>
-          </a:p>
-          <a:p xmlns:a="http://schemas.openxmlformats.org/drawingml/2006/main">
-            <a:r>
-              <a:rPr sz="1400"/>
-              <a:t>Antwoordmodel: https://github.com/meijer1973/4veco-lessen/blob/e734532a42b27732ac25ce990fc9448b12309d28/edities/books34-v3/books/book-4/chapters/4.3/Antwoorden.md</a:t>
-            </a:r>
-          </a:p>
-          <a:p xmlns:a="http://schemas.openxmlformats.org/drawingml/2006/main">
-            <a:r>
-              <a:rPr sz="1400"/>
-              <a:t>Docenteninformatie: https://github.com/meijer1973/4veco-lessen/blob/e734532a42b27732ac25ce990fc9448b12309d28/edities/books34-v3/books/book-4/chapters/4.3/Docenteninformatie.md</a:t>
+              <a:t>Bron: Boek 4, books34-v3, broncommit 0356afb6cac2dd43adbe9f63b872aaf423efc914. Gedrukte boekpagina’s 152–153 (hoofdstukpagina’s 40–41). https://github.com/meijer1973/4veco-lessen/blob/0356afb6cac2dd43adbe9f63b872aaf423efc914/edities/books34-v3/books/book-4/output/Boek_4_Compleet_v3.pdf</a:t>
+            </a:r>
+          </a:p>
+          <a:p xmlns:a="http://schemas.openxmlformats.org/drawingml/2006/main">
+            <a:r>
+              <a:rPr sz="1400"/>
+              <a:t>Manuscript: https://github.com/meijer1973/4veco-lessen/blob/0356afb6cac2dd43adbe9f63b872aaf423efc914/edities/books34-v3/books/book-4/chapters/4.3/4.3.5%20manuscript.md</a:t>
+            </a:r>
+          </a:p>
+          <a:p xmlns:a="http://schemas.openxmlformats.org/drawingml/2006/main">
+            <a:r>
+              <a:rPr sz="1400"/>
+              <a:t>Antwoordmodel: https://github.com/meijer1973/4veco-lessen/blob/0356afb6cac2dd43adbe9f63b872aaf423efc914/edities/books34-v3/books/book-4/chapters/4.3/Antwoorden.md</a:t>
+            </a:r>
+          </a:p>
+          <a:p xmlns:a="http://schemas.openxmlformats.org/drawingml/2006/main">
+            <a:r>
+              <a:rPr sz="1400"/>
+              <a:t>Docenteninformatie: https://github.com/meijer1973/4veco-lessen/blob/0356afb6cac2dd43adbe9f63b872aaf423efc914/edities/books34-v3/books/book-4/chapters/4.3/Docenteninformatie.md</a:t>
             </a:r>
           </a:p>
           <a:p xmlns:a="http://schemas.openxmlformats.org/drawingml/2006/main">
@@ -939,25 +939,25 @@
           <a:p xmlns:a="http://schemas.openxmlformats.org/drawingml/2006/main">
             <a:r>
               <a:rPr sz="1400"/>
-              <a:t>Bron: Boek 4, books34-v3, broncommit e734532a42b27732ac25ce990fc9448b12309d28. Gedrukte boekpagina’s 152–153 (hoofdstukpagina’s 40–41). https://github.com/meijer1973/4veco-lessen/blob/e734532a42b27732ac25ce990fc9448b12309d28/edities/books34-v3/books/book-4/output/Boek_4_Compleet_v3.pdf</a:t>
-            </a:r>
-          </a:p>
-          <a:p xmlns:a="http://schemas.openxmlformats.org/drawingml/2006/main">
-            <a:r>
-              <a:rPr sz="1400"/>
-              <a:t>Manuscript: https://github.com/meijer1973/4veco-lessen/blob/e734532a42b27732ac25ce990fc9448b12309d28/edities/books34-v3/books/book-4/chapters/4.3/4.3.5%20manuscript.md</a:t>
-            </a:r>
-          </a:p>
-          <a:p xmlns:a="http://schemas.openxmlformats.org/drawingml/2006/main">
-            <a:r>
-              <a:rPr sz="1400"/>
-              <a:t>Antwoordmodel: https://github.com/meijer1973/4veco-lessen/blob/e734532a42b27732ac25ce990fc9448b12309d28/edities/books34-v3/books/book-4/chapters/4.3/Antwoorden.md</a:t>
-            </a:r>
-          </a:p>
-          <a:p xmlns:a="http://schemas.openxmlformats.org/drawingml/2006/main">
-            <a:r>
-              <a:rPr sz="1400"/>
-              <a:t>Docenteninformatie: https://github.com/meijer1973/4veco-lessen/blob/e734532a42b27732ac25ce990fc9448b12309d28/edities/books34-v3/books/book-4/chapters/4.3/Docenteninformatie.md</a:t>
+              <a:t>Bron: Boek 4, books34-v3, broncommit 0356afb6cac2dd43adbe9f63b872aaf423efc914. Gedrukte boekpagina’s 152–153 (hoofdstukpagina’s 40–41). https://github.com/meijer1973/4veco-lessen/blob/0356afb6cac2dd43adbe9f63b872aaf423efc914/edities/books34-v3/books/book-4/output/Boek_4_Compleet_v3.pdf</a:t>
+            </a:r>
+          </a:p>
+          <a:p xmlns:a="http://schemas.openxmlformats.org/drawingml/2006/main">
+            <a:r>
+              <a:rPr sz="1400"/>
+              <a:t>Manuscript: https://github.com/meijer1973/4veco-lessen/blob/0356afb6cac2dd43adbe9f63b872aaf423efc914/edities/books34-v3/books/book-4/chapters/4.3/4.3.5%20manuscript.md</a:t>
+            </a:r>
+          </a:p>
+          <a:p xmlns:a="http://schemas.openxmlformats.org/drawingml/2006/main">
+            <a:r>
+              <a:rPr sz="1400"/>
+              <a:t>Antwoordmodel: https://github.com/meijer1973/4veco-lessen/blob/0356afb6cac2dd43adbe9f63b872aaf423efc914/edities/books34-v3/books/book-4/chapters/4.3/Antwoorden.md</a:t>
+            </a:r>
+          </a:p>
+          <a:p xmlns:a="http://schemas.openxmlformats.org/drawingml/2006/main">
+            <a:r>
+              <a:rPr sz="1400"/>
+              <a:t>Docenteninformatie: https://github.com/meijer1973/4veco-lessen/blob/0356afb6cac2dd43adbe9f63b872aaf423efc914/edities/books34-v3/books/book-4/chapters/4.3/Docenteninformatie.md</a:t>
             </a:r>
           </a:p>
           <a:p xmlns:a="http://schemas.openxmlformats.org/drawingml/2006/main">
@@ -1082,25 +1082,25 @@
           <a:p xmlns:a="http://schemas.openxmlformats.org/drawingml/2006/main">
             <a:r>
               <a:rPr sz="1400"/>
-              <a:t>Bron: Boek 4, books34-v3, broncommit e734532a42b27732ac25ce990fc9448b12309d28. Gedrukte boekpagina’s 152–153 (hoofdstukpagina’s 40–41). https://github.com/meijer1973/4veco-lessen/blob/e734532a42b27732ac25ce990fc9448b12309d28/edities/books34-v3/books/book-4/output/Boek_4_Compleet_v3.pdf</a:t>
-            </a:r>
-          </a:p>
-          <a:p xmlns:a="http://schemas.openxmlformats.org/drawingml/2006/main">
-            <a:r>
-              <a:rPr sz="1400"/>
-              <a:t>Manuscript: https://github.com/meijer1973/4veco-lessen/blob/e734532a42b27732ac25ce990fc9448b12309d28/edities/books34-v3/books/book-4/chapters/4.3/4.3.5%20manuscript.md</a:t>
-            </a:r>
-          </a:p>
-          <a:p xmlns:a="http://schemas.openxmlformats.org/drawingml/2006/main">
-            <a:r>
-              <a:rPr sz="1400"/>
-              <a:t>Antwoordmodel: https://github.com/meijer1973/4veco-lessen/blob/e734532a42b27732ac25ce990fc9448b12309d28/edities/books34-v3/books/book-4/chapters/4.3/Antwoorden.md</a:t>
-            </a:r>
-          </a:p>
-          <a:p xmlns:a="http://schemas.openxmlformats.org/drawingml/2006/main">
-            <a:r>
-              <a:rPr sz="1400"/>
-              <a:t>Docenteninformatie: https://github.com/meijer1973/4veco-lessen/blob/e734532a42b27732ac25ce990fc9448b12309d28/edities/books34-v3/books/book-4/chapters/4.3/Docenteninformatie.md</a:t>
+              <a:t>Bron: Boek 4, books34-v3, broncommit 0356afb6cac2dd43adbe9f63b872aaf423efc914. Gedrukte boekpagina’s 152–153 (hoofdstukpagina’s 40–41). https://github.com/meijer1973/4veco-lessen/blob/0356afb6cac2dd43adbe9f63b872aaf423efc914/edities/books34-v3/books/book-4/output/Boek_4_Compleet_v3.pdf</a:t>
+            </a:r>
+          </a:p>
+          <a:p xmlns:a="http://schemas.openxmlformats.org/drawingml/2006/main">
+            <a:r>
+              <a:rPr sz="1400"/>
+              <a:t>Manuscript: https://github.com/meijer1973/4veco-lessen/blob/0356afb6cac2dd43adbe9f63b872aaf423efc914/edities/books34-v3/books/book-4/chapters/4.3/4.3.5%20manuscript.md</a:t>
+            </a:r>
+          </a:p>
+          <a:p xmlns:a="http://schemas.openxmlformats.org/drawingml/2006/main">
+            <a:r>
+              <a:rPr sz="1400"/>
+              <a:t>Antwoordmodel: https://github.com/meijer1973/4veco-lessen/blob/0356afb6cac2dd43adbe9f63b872aaf423efc914/edities/books34-v3/books/book-4/chapters/4.3/Antwoorden.md</a:t>
+            </a:r>
+          </a:p>
+          <a:p xmlns:a="http://schemas.openxmlformats.org/drawingml/2006/main">
+            <a:r>
+              <a:rPr sz="1400"/>
+              <a:t>Docenteninformatie: https://github.com/meijer1973/4veco-lessen/blob/0356afb6cac2dd43adbe9f63b872aaf423efc914/edities/books34-v3/books/book-4/chapters/4.3/Docenteninformatie.md</a:t>
             </a:r>
           </a:p>
           <a:p xmlns:a="http://schemas.openxmlformats.org/drawingml/2006/main">
@@ -1225,25 +1225,25 @@
           <a:p xmlns:a="http://schemas.openxmlformats.org/drawingml/2006/main">
             <a:r>
               <a:rPr sz="1400"/>
-              <a:t>Bron: Boek 4, books34-v3, broncommit e734532a42b27732ac25ce990fc9448b12309d28. Gedrukte boekpagina’s 152–153 (hoofdstukpagina’s 40–41). https://github.com/meijer1973/4veco-lessen/blob/e734532a42b27732ac25ce990fc9448b12309d28/edities/books34-v3/books/book-4/output/Boek_4_Compleet_v3.pdf</a:t>
-            </a:r>
-          </a:p>
-          <a:p xmlns:a="http://schemas.openxmlformats.org/drawingml/2006/main">
-            <a:r>
-              <a:rPr sz="1400"/>
-              <a:t>Manuscript: https://github.com/meijer1973/4veco-lessen/blob/e734532a42b27732ac25ce990fc9448b12309d28/edities/books34-v3/books/book-4/chapters/4.3/4.3.5%20manuscript.md</a:t>
-            </a:r>
-          </a:p>
-          <a:p xmlns:a="http://schemas.openxmlformats.org/drawingml/2006/main">
-            <a:r>
-              <a:rPr sz="1400"/>
-              <a:t>Antwoordmodel: https://github.com/meijer1973/4veco-lessen/blob/e734532a42b27732ac25ce990fc9448b12309d28/edities/books34-v3/books/book-4/chapters/4.3/Antwoorden.md</a:t>
-            </a:r>
-          </a:p>
-          <a:p xmlns:a="http://schemas.openxmlformats.org/drawingml/2006/main">
-            <a:r>
-              <a:rPr sz="1400"/>
-              <a:t>Docenteninformatie: https://github.com/meijer1973/4veco-lessen/blob/e734532a42b27732ac25ce990fc9448b12309d28/edities/books34-v3/books/book-4/chapters/4.3/Docenteninformatie.md</a:t>
+              <a:t>Bron: Boek 4, books34-v3, broncommit 0356afb6cac2dd43adbe9f63b872aaf423efc914. Gedrukte boekpagina’s 152–153 (hoofdstukpagina’s 40–41). https://github.com/meijer1973/4veco-lessen/blob/0356afb6cac2dd43adbe9f63b872aaf423efc914/edities/books34-v3/books/book-4/output/Boek_4_Compleet_v3.pdf</a:t>
+            </a:r>
+          </a:p>
+          <a:p xmlns:a="http://schemas.openxmlformats.org/drawingml/2006/main">
+            <a:r>
+              <a:rPr sz="1400"/>
+              <a:t>Manuscript: https://github.com/meijer1973/4veco-lessen/blob/0356afb6cac2dd43adbe9f63b872aaf423efc914/edities/books34-v3/books/book-4/chapters/4.3/4.3.5%20manuscript.md</a:t>
+            </a:r>
+          </a:p>
+          <a:p xmlns:a="http://schemas.openxmlformats.org/drawingml/2006/main">
+            <a:r>
+              <a:rPr sz="1400"/>
+              <a:t>Antwoordmodel: https://github.com/meijer1973/4veco-lessen/blob/0356afb6cac2dd43adbe9f63b872aaf423efc914/edities/books34-v3/books/book-4/chapters/4.3/Antwoorden.md</a:t>
+            </a:r>
+          </a:p>
+          <a:p xmlns:a="http://schemas.openxmlformats.org/drawingml/2006/main">
+            <a:r>
+              <a:rPr sz="1400"/>
+              <a:t>Docenteninformatie: https://github.com/meijer1973/4veco-lessen/blob/0356afb6cac2dd43adbe9f63b872aaf423efc914/edities/books34-v3/books/book-4/chapters/4.3/Docenteninformatie.md</a:t>
             </a:r>
           </a:p>
           <a:p xmlns:a="http://schemas.openxmlformats.org/drawingml/2006/main">
@@ -1332,7 +1332,7 @@
           <a:p xmlns:a="http://schemas.openxmlformats.org/drawingml/2006/main">
             <a:r>
               <a:rPr sz="1400"/>
-              <a:t>Uitleg: E0=(100,14), E1=(120,16), dus horizontaal personen en verticaal euro per uur. Geleidelijnen sluiten op de punten aan. De juiste hoeveelheid en prijs volgen uit de berekeningen. De oorspronkelijke boekfiguur loopt buiten het modelbereik door (bevinding 435-S2). Deze bewerkbare antwoordgrafiek beperkt de lijnstukken expliciet tot €4–€24, behoudt de functies en gebruikt dezelfde hoeveelheidsgrens 280 en loongrens 32.</a:t>
+              <a:t>Uitleg: E0=(100,14), E1=(120,16), dus horizontaal personen en verticaal euro per uur. Geleidelijnen sluiten op de punten aan. De juiste hoeveelheid en prijs volgen uit de berekeningen. De boekfiguur en deze bewerkbare antwoordgrafiek beperken de lijnstukken tot €4–€24. Functies en assenschalen blijven gelijk: de hoeveelheidsgrens is 280 en de loongrens 32.</a:t>
             </a:r>
           </a:p>
           <a:p xmlns:a="http://schemas.openxmlformats.org/drawingml/2006/main">
@@ -1368,25 +1368,25 @@
           <a:p xmlns:a="http://schemas.openxmlformats.org/drawingml/2006/main">
             <a:r>
               <a:rPr sz="1400"/>
-              <a:t>Bron: Boek 4, books34-v3, broncommit e734532a42b27732ac25ce990fc9448b12309d28. Gedrukte boekpagina’s 152–153 (hoofdstukpagina’s 40–41). https://github.com/meijer1973/4veco-lessen/blob/e734532a42b27732ac25ce990fc9448b12309d28/edities/books34-v3/books/book-4/output/Boek_4_Compleet_v3.pdf</a:t>
-            </a:r>
-          </a:p>
-          <a:p xmlns:a="http://schemas.openxmlformats.org/drawingml/2006/main">
-            <a:r>
-              <a:rPr sz="1400"/>
-              <a:t>Manuscript: https://github.com/meijer1973/4veco-lessen/blob/e734532a42b27732ac25ce990fc9448b12309d28/edities/books34-v3/books/book-4/chapters/4.3/4.3.5%20manuscript.md</a:t>
-            </a:r>
-          </a:p>
-          <a:p xmlns:a="http://schemas.openxmlformats.org/drawingml/2006/main">
-            <a:r>
-              <a:rPr sz="1400"/>
-              <a:t>Antwoordmodel: https://github.com/meijer1973/4veco-lessen/blob/e734532a42b27732ac25ce990fc9448b12309d28/edities/books34-v3/books/book-4/chapters/4.3/Antwoorden.md</a:t>
-            </a:r>
-          </a:p>
-          <a:p xmlns:a="http://schemas.openxmlformats.org/drawingml/2006/main">
-            <a:r>
-              <a:rPr sz="1400"/>
-              <a:t>Docenteninformatie: https://github.com/meijer1973/4veco-lessen/blob/e734532a42b27732ac25ce990fc9448b12309d28/edities/books34-v3/books/book-4/chapters/4.3/Docenteninformatie.md</a:t>
+              <a:t>Bron: Boek 4, books34-v3, broncommit 0356afb6cac2dd43adbe9f63b872aaf423efc914. Gedrukte boekpagina’s 152–153 (hoofdstukpagina’s 40–41). https://github.com/meijer1973/4veco-lessen/blob/0356afb6cac2dd43adbe9f63b872aaf423efc914/edities/books34-v3/books/book-4/output/Boek_4_Compleet_v3.pdf</a:t>
+            </a:r>
+          </a:p>
+          <a:p xmlns:a="http://schemas.openxmlformats.org/drawingml/2006/main">
+            <a:r>
+              <a:rPr sz="1400"/>
+              <a:t>Manuscript: https://github.com/meijer1973/4veco-lessen/blob/0356afb6cac2dd43adbe9f63b872aaf423efc914/edities/books34-v3/books/book-4/chapters/4.3/4.3.5%20manuscript.md</a:t>
+            </a:r>
+          </a:p>
+          <a:p xmlns:a="http://schemas.openxmlformats.org/drawingml/2006/main">
+            <a:r>
+              <a:rPr sz="1400"/>
+              <a:t>Antwoordmodel: https://github.com/meijer1973/4veco-lessen/blob/0356afb6cac2dd43adbe9f63b872aaf423efc914/edities/books34-v3/books/book-4/chapters/4.3/Antwoorden.md</a:t>
+            </a:r>
+          </a:p>
+          <a:p xmlns:a="http://schemas.openxmlformats.org/drawingml/2006/main">
+            <a:r>
+              <a:rPr sz="1400"/>
+              <a:t>Docenteninformatie: https://github.com/meijer1973/4veco-lessen/blob/0356afb6cac2dd43adbe9f63b872aaf423efc914/edities/books34-v3/books/book-4/chapters/4.3/Docenteninformatie.md</a:t>
             </a:r>
           </a:p>
           <a:p xmlns:a="http://schemas.openxmlformats.org/drawingml/2006/main">
@@ -1511,25 +1511,25 @@
           <a:p xmlns:a="http://schemas.openxmlformats.org/drawingml/2006/main">
             <a:r>
               <a:rPr sz="1400"/>
-              <a:t>Bron: Boek 4, books34-v3, broncommit e734532a42b27732ac25ce990fc9448b12309d28. Gedrukte boekpagina’s 152–153 (hoofdstukpagina’s 40–41). https://github.com/meijer1973/4veco-lessen/blob/e734532a42b27732ac25ce990fc9448b12309d28/edities/books34-v3/books/book-4/output/Boek_4_Compleet_v3.pdf</a:t>
-            </a:r>
-          </a:p>
-          <a:p xmlns:a="http://schemas.openxmlformats.org/drawingml/2006/main">
-            <a:r>
-              <a:rPr sz="1400"/>
-              <a:t>Manuscript: https://github.com/meijer1973/4veco-lessen/blob/e734532a42b27732ac25ce990fc9448b12309d28/edities/books34-v3/books/book-4/chapters/4.3/4.3.5%20manuscript.md</a:t>
-            </a:r>
-          </a:p>
-          <a:p xmlns:a="http://schemas.openxmlformats.org/drawingml/2006/main">
-            <a:r>
-              <a:rPr sz="1400"/>
-              <a:t>Antwoordmodel: https://github.com/meijer1973/4veco-lessen/blob/e734532a42b27732ac25ce990fc9448b12309d28/edities/books34-v3/books/book-4/chapters/4.3/Antwoorden.md</a:t>
-            </a:r>
-          </a:p>
-          <a:p xmlns:a="http://schemas.openxmlformats.org/drawingml/2006/main">
-            <a:r>
-              <a:rPr sz="1400"/>
-              <a:t>Docenteninformatie: https://github.com/meijer1973/4veco-lessen/blob/e734532a42b27732ac25ce990fc9448b12309d28/edities/books34-v3/books/book-4/chapters/4.3/Docenteninformatie.md</a:t>
+              <a:t>Bron: Boek 4, books34-v3, broncommit 0356afb6cac2dd43adbe9f63b872aaf423efc914. Gedrukte boekpagina’s 152–153 (hoofdstukpagina’s 40–41). https://github.com/meijer1973/4veco-lessen/blob/0356afb6cac2dd43adbe9f63b872aaf423efc914/edities/books34-v3/books/book-4/output/Boek_4_Compleet_v3.pdf</a:t>
+            </a:r>
+          </a:p>
+          <a:p xmlns:a="http://schemas.openxmlformats.org/drawingml/2006/main">
+            <a:r>
+              <a:rPr sz="1400"/>
+              <a:t>Manuscript: https://github.com/meijer1973/4veco-lessen/blob/0356afb6cac2dd43adbe9f63b872aaf423efc914/edities/books34-v3/books/book-4/chapters/4.3/4.3.5%20manuscript.md</a:t>
+            </a:r>
+          </a:p>
+          <a:p xmlns:a="http://schemas.openxmlformats.org/drawingml/2006/main">
+            <a:r>
+              <a:rPr sz="1400"/>
+              <a:t>Antwoordmodel: https://github.com/meijer1973/4veco-lessen/blob/0356afb6cac2dd43adbe9f63b872aaf423efc914/edities/books34-v3/books/book-4/chapters/4.3/Antwoorden.md</a:t>
+            </a:r>
+          </a:p>
+          <a:p xmlns:a="http://schemas.openxmlformats.org/drawingml/2006/main">
+            <a:r>
+              <a:rPr sz="1400"/>
+              <a:t>Docenteninformatie: https://github.com/meijer1973/4veco-lessen/blob/0356afb6cac2dd43adbe9f63b872aaf423efc914/edities/books34-v3/books/book-4/chapters/4.3/Docenteninformatie.md</a:t>
             </a:r>
           </a:p>
           <a:p xmlns:a="http://schemas.openxmlformats.org/drawingml/2006/main">
@@ -1654,25 +1654,25 @@
           <a:p xmlns:a="http://schemas.openxmlformats.org/drawingml/2006/main">
             <a:r>
               <a:rPr sz="1400"/>
-              <a:t>Bron: Boek 4, books34-v3, broncommit e734532a42b27732ac25ce990fc9448b12309d28. Gedrukte boekpagina’s 152–153 (hoofdstukpagina’s 40–41). https://github.com/meijer1973/4veco-lessen/blob/e734532a42b27732ac25ce990fc9448b12309d28/edities/books34-v3/books/book-4/output/Boek_4_Compleet_v3.pdf</a:t>
-            </a:r>
-          </a:p>
-          <a:p xmlns:a="http://schemas.openxmlformats.org/drawingml/2006/main">
-            <a:r>
-              <a:rPr sz="1400"/>
-              <a:t>Manuscript: https://github.com/meijer1973/4veco-lessen/blob/e734532a42b27732ac25ce990fc9448b12309d28/edities/books34-v3/books/book-4/chapters/4.3/4.3.5%20manuscript.md</a:t>
-            </a:r>
-          </a:p>
-          <a:p xmlns:a="http://schemas.openxmlformats.org/drawingml/2006/main">
-            <a:r>
-              <a:rPr sz="1400"/>
-              <a:t>Antwoordmodel: https://github.com/meijer1973/4veco-lessen/blob/e734532a42b27732ac25ce990fc9448b12309d28/edities/books34-v3/books/book-4/chapters/4.3/Antwoorden.md</a:t>
-            </a:r>
-          </a:p>
-          <a:p xmlns:a="http://schemas.openxmlformats.org/drawingml/2006/main">
-            <a:r>
-              <a:rPr sz="1400"/>
-              <a:t>Docenteninformatie: https://github.com/meijer1973/4veco-lessen/blob/e734532a42b27732ac25ce990fc9448b12309d28/edities/books34-v3/books/book-4/chapters/4.3/Docenteninformatie.md</a:t>
+              <a:t>Bron: Boek 4, books34-v3, broncommit 0356afb6cac2dd43adbe9f63b872aaf423efc914. Gedrukte boekpagina’s 152–153 (hoofdstukpagina’s 40–41). https://github.com/meijer1973/4veco-lessen/blob/0356afb6cac2dd43adbe9f63b872aaf423efc914/edities/books34-v3/books/book-4/output/Boek_4_Compleet_v3.pdf</a:t>
+            </a:r>
+          </a:p>
+          <a:p xmlns:a="http://schemas.openxmlformats.org/drawingml/2006/main">
+            <a:r>
+              <a:rPr sz="1400"/>
+              <a:t>Manuscript: https://github.com/meijer1973/4veco-lessen/blob/0356afb6cac2dd43adbe9f63b872aaf423efc914/edities/books34-v3/books/book-4/chapters/4.3/4.3.5%20manuscript.md</a:t>
+            </a:r>
+          </a:p>
+          <a:p xmlns:a="http://schemas.openxmlformats.org/drawingml/2006/main">
+            <a:r>
+              <a:rPr sz="1400"/>
+              <a:t>Antwoordmodel: https://github.com/meijer1973/4veco-lessen/blob/0356afb6cac2dd43adbe9f63b872aaf423efc914/edities/books34-v3/books/book-4/chapters/4.3/Antwoorden.md</a:t>
+            </a:r>
+          </a:p>
+          <a:p xmlns:a="http://schemas.openxmlformats.org/drawingml/2006/main">
+            <a:r>
+              <a:rPr sz="1400"/>
+              <a:t>Docenteninformatie: https://github.com/meijer1973/4veco-lessen/blob/0356afb6cac2dd43adbe9f63b872aaf423efc914/edities/books34-v3/books/book-4/chapters/4.3/Docenteninformatie.md</a:t>
             </a:r>
           </a:p>
           <a:p xmlns:a="http://schemas.openxmlformats.org/drawingml/2006/main">
@@ -1797,25 +1797,25 @@
           <a:p xmlns:a="http://schemas.openxmlformats.org/drawingml/2006/main">
             <a:r>
               <a:rPr sz="1400"/>
-              <a:t>Bron: Boek 4, books34-v3, broncommit e734532a42b27732ac25ce990fc9448b12309d28. Gedrukte boekpagina’s 152–153 (hoofdstukpagina’s 40–41). https://github.com/meijer1973/4veco-lessen/blob/e734532a42b27732ac25ce990fc9448b12309d28/edities/books34-v3/books/book-4/output/Boek_4_Compleet_v3.pdf</a:t>
-            </a:r>
-          </a:p>
-          <a:p xmlns:a="http://schemas.openxmlformats.org/drawingml/2006/main">
-            <a:r>
-              <a:rPr sz="1400"/>
-              <a:t>Manuscript: https://github.com/meijer1973/4veco-lessen/blob/e734532a42b27732ac25ce990fc9448b12309d28/edities/books34-v3/books/book-4/chapters/4.3/4.3.5%20manuscript.md</a:t>
-            </a:r>
-          </a:p>
-          <a:p xmlns:a="http://schemas.openxmlformats.org/drawingml/2006/main">
-            <a:r>
-              <a:rPr sz="1400"/>
-              <a:t>Antwoordmodel: https://github.com/meijer1973/4veco-lessen/blob/e734532a42b27732ac25ce990fc9448b12309d28/edities/books34-v3/books/book-4/chapters/4.3/Antwoorden.md</a:t>
-            </a:r>
-          </a:p>
-          <a:p xmlns:a="http://schemas.openxmlformats.org/drawingml/2006/main">
-            <a:r>
-              <a:rPr sz="1400"/>
-              <a:t>Docenteninformatie: https://github.com/meijer1973/4veco-lessen/blob/e734532a42b27732ac25ce990fc9448b12309d28/edities/books34-v3/books/book-4/chapters/4.3/Docenteninformatie.md</a:t>
+              <a:t>Bron: Boek 4, books34-v3, broncommit 0356afb6cac2dd43adbe9f63b872aaf423efc914. Gedrukte boekpagina’s 152–153 (hoofdstukpagina’s 40–41). https://github.com/meijer1973/4veco-lessen/blob/0356afb6cac2dd43adbe9f63b872aaf423efc914/edities/books34-v3/books/book-4/output/Boek_4_Compleet_v3.pdf</a:t>
+            </a:r>
+          </a:p>
+          <a:p xmlns:a="http://schemas.openxmlformats.org/drawingml/2006/main">
+            <a:r>
+              <a:rPr sz="1400"/>
+              <a:t>Manuscript: https://github.com/meijer1973/4veco-lessen/blob/0356afb6cac2dd43adbe9f63b872aaf423efc914/edities/books34-v3/books/book-4/chapters/4.3/4.3.5%20manuscript.md</a:t>
+            </a:r>
+          </a:p>
+          <a:p xmlns:a="http://schemas.openxmlformats.org/drawingml/2006/main">
+            <a:r>
+              <a:rPr sz="1400"/>
+              <a:t>Antwoordmodel: https://github.com/meijer1973/4veco-lessen/blob/0356afb6cac2dd43adbe9f63b872aaf423efc914/edities/books34-v3/books/book-4/chapters/4.3/Antwoorden.md</a:t>
+            </a:r>
+          </a:p>
+          <a:p xmlns:a="http://schemas.openxmlformats.org/drawingml/2006/main">
+            <a:r>
+              <a:rPr sz="1400"/>
+              <a:t>Docenteninformatie: https://github.com/meijer1973/4veco-lessen/blob/0356afb6cac2dd43adbe9f63b872aaf423efc914/edities/books34-v3/books/book-4/chapters/4.3/Docenteninformatie.md</a:t>
             </a:r>
           </a:p>
           <a:p xmlns:a="http://schemas.openxmlformats.org/drawingml/2006/main">
@@ -1940,25 +1940,25 @@
           <a:p xmlns:a="http://schemas.openxmlformats.org/drawingml/2006/main">
             <a:r>
               <a:rPr sz="1400"/>
-              <a:t>Bron: Boek 4, books34-v3, broncommit e734532a42b27732ac25ce990fc9448b12309d28. Gedrukte boekpagina’s 152–153 (hoofdstukpagina’s 40–41). https://github.com/meijer1973/4veco-lessen/blob/e734532a42b27732ac25ce990fc9448b12309d28/edities/books34-v3/books/book-4/output/Boek_4_Compleet_v3.pdf</a:t>
-            </a:r>
-          </a:p>
-          <a:p xmlns:a="http://schemas.openxmlformats.org/drawingml/2006/main">
-            <a:r>
-              <a:rPr sz="1400"/>
-              <a:t>Manuscript: https://github.com/meijer1973/4veco-lessen/blob/e734532a42b27732ac25ce990fc9448b12309d28/edities/books34-v3/books/book-4/chapters/4.3/4.3.5%20manuscript.md</a:t>
-            </a:r>
-          </a:p>
-          <a:p xmlns:a="http://schemas.openxmlformats.org/drawingml/2006/main">
-            <a:r>
-              <a:rPr sz="1400"/>
-              <a:t>Antwoordmodel: https://github.com/meijer1973/4veco-lessen/blob/e734532a42b27732ac25ce990fc9448b12309d28/edities/books34-v3/books/book-4/chapters/4.3/Antwoorden.md</a:t>
-            </a:r>
-          </a:p>
-          <a:p xmlns:a="http://schemas.openxmlformats.org/drawingml/2006/main">
-            <a:r>
-              <a:rPr sz="1400"/>
-              <a:t>Docenteninformatie: https://github.com/meijer1973/4veco-lessen/blob/e734532a42b27732ac25ce990fc9448b12309d28/edities/books34-v3/books/book-4/chapters/4.3/Docenteninformatie.md</a:t>
+              <a:t>Bron: Boek 4, books34-v3, broncommit 0356afb6cac2dd43adbe9f63b872aaf423efc914. Gedrukte boekpagina’s 152–153 (hoofdstukpagina’s 40–41). https://github.com/meijer1973/4veco-lessen/blob/0356afb6cac2dd43adbe9f63b872aaf423efc914/edities/books34-v3/books/book-4/output/Boek_4_Compleet_v3.pdf</a:t>
+            </a:r>
+          </a:p>
+          <a:p xmlns:a="http://schemas.openxmlformats.org/drawingml/2006/main">
+            <a:r>
+              <a:rPr sz="1400"/>
+              <a:t>Manuscript: https://github.com/meijer1973/4veco-lessen/blob/0356afb6cac2dd43adbe9f63b872aaf423efc914/edities/books34-v3/books/book-4/chapters/4.3/4.3.5%20manuscript.md</a:t>
+            </a:r>
+          </a:p>
+          <a:p xmlns:a="http://schemas.openxmlformats.org/drawingml/2006/main">
+            <a:r>
+              <a:rPr sz="1400"/>
+              <a:t>Antwoordmodel: https://github.com/meijer1973/4veco-lessen/blob/0356afb6cac2dd43adbe9f63b872aaf423efc914/edities/books34-v3/books/book-4/chapters/4.3/Antwoorden.md</a:t>
+            </a:r>
+          </a:p>
+          <a:p xmlns:a="http://schemas.openxmlformats.org/drawingml/2006/main">
+            <a:r>
+              <a:rPr sz="1400"/>
+              <a:t>Docenteninformatie: https://github.com/meijer1973/4veco-lessen/blob/0356afb6cac2dd43adbe9f63b872aaf423efc914/edities/books34-v3/books/book-4/chapters/4.3/Docenteninformatie.md</a:t>
             </a:r>
           </a:p>
           <a:p xmlns:a="http://schemas.openxmlformats.org/drawingml/2006/main">
@@ -2083,25 +2083,25 @@
           <a:p xmlns:a="http://schemas.openxmlformats.org/drawingml/2006/main">
             <a:r>
               <a:rPr sz="1400"/>
-              <a:t>Bron: Boek 4, books34-v3, broncommit e734532a42b27732ac25ce990fc9448b12309d28. Gedrukte boekpagina’s 115–118, 124–126 en 132–135; overzicht op p.149. https://github.com/meijer1973/4veco-lessen/blob/e734532a42b27732ac25ce990fc9448b12309d28/edities/books34-v3/books/book-4/output/Boek_4_Compleet_v3.pdf</a:t>
-            </a:r>
-          </a:p>
-          <a:p xmlns:a="http://schemas.openxmlformats.org/drawingml/2006/main">
-            <a:r>
-              <a:rPr sz="1400"/>
-              <a:t>Manuscript: https://github.com/meijer1973/4veco-lessen/blob/e734532a42b27732ac25ce990fc9448b12309d28/edities/books34-v3/books/book-4/chapters/4.3/4.3.5%20manuscript.md</a:t>
-            </a:r>
-          </a:p>
-          <a:p xmlns:a="http://schemas.openxmlformats.org/drawingml/2006/main">
-            <a:r>
-              <a:rPr sz="1400"/>
-              <a:t>Antwoordmodel: https://github.com/meijer1973/4veco-lessen/blob/e734532a42b27732ac25ce990fc9448b12309d28/edities/books34-v3/books/book-4/chapters/4.3/Antwoorden.md</a:t>
-            </a:r>
-          </a:p>
-          <a:p xmlns:a="http://schemas.openxmlformats.org/drawingml/2006/main">
-            <a:r>
-              <a:rPr sz="1400"/>
-              <a:t>Docenteninformatie: https://github.com/meijer1973/4veco-lessen/blob/e734532a42b27732ac25ce990fc9448b12309d28/edities/books34-v3/books/book-4/chapters/4.3/Docenteninformatie.md</a:t>
+              <a:t>Bron: Boek 4, books34-v3, broncommit 0356afb6cac2dd43adbe9f63b872aaf423efc914. Gedrukte boekpagina’s 115–118, 124–126 en 132–135; overzicht op p.149. https://github.com/meijer1973/4veco-lessen/blob/0356afb6cac2dd43adbe9f63b872aaf423efc914/edities/books34-v3/books/book-4/output/Boek_4_Compleet_v3.pdf</a:t>
+            </a:r>
+          </a:p>
+          <a:p xmlns:a="http://schemas.openxmlformats.org/drawingml/2006/main">
+            <a:r>
+              <a:rPr sz="1400"/>
+              <a:t>Manuscript: https://github.com/meijer1973/4veco-lessen/blob/0356afb6cac2dd43adbe9f63b872aaf423efc914/edities/books34-v3/books/book-4/chapters/4.3/4.3.5%20manuscript.md</a:t>
+            </a:r>
+          </a:p>
+          <a:p xmlns:a="http://schemas.openxmlformats.org/drawingml/2006/main">
+            <a:r>
+              <a:rPr sz="1400"/>
+              <a:t>Antwoordmodel: https://github.com/meijer1973/4veco-lessen/blob/0356afb6cac2dd43adbe9f63b872aaf423efc914/edities/books34-v3/books/book-4/chapters/4.3/Antwoorden.md</a:t>
+            </a:r>
+          </a:p>
+          <a:p xmlns:a="http://schemas.openxmlformats.org/drawingml/2006/main">
+            <a:r>
+              <a:rPr sz="1400"/>
+              <a:t>Docenteninformatie: https://github.com/meijer1973/4veco-lessen/blob/0356afb6cac2dd43adbe9f63b872aaf423efc914/edities/books34-v3/books/book-4/chapters/4.3/Docenteninformatie.md</a:t>
             </a:r>
           </a:p>
           <a:p xmlns:a="http://schemas.openxmlformats.org/drawingml/2006/main">
@@ -2226,25 +2226,25 @@
           <a:p xmlns:a="http://schemas.openxmlformats.org/drawingml/2006/main">
             <a:r>
               <a:rPr sz="1400"/>
-              <a:t>Bron: Boek 4, books34-v3, broncommit e734532a42b27732ac25ce990fc9448b12309d28. Gedrukte boekpagina 150: start. Opgave 40: bronnen p.152 en vragen p.153. https://github.com/meijer1973/4veco-lessen/blob/e734532a42b27732ac25ce990fc9448b12309d28/edities/books34-v3/books/book-4/output/Boek_4_Compleet_v3.pdf</a:t>
-            </a:r>
-          </a:p>
-          <a:p xmlns:a="http://schemas.openxmlformats.org/drawingml/2006/main">
-            <a:r>
-              <a:rPr sz="1400"/>
-              <a:t>Manuscript: https://github.com/meijer1973/4veco-lessen/blob/e734532a42b27732ac25ce990fc9448b12309d28/edities/books34-v3/books/book-4/chapters/4.3/4.3.5%20manuscript.md</a:t>
-            </a:r>
-          </a:p>
-          <a:p xmlns:a="http://schemas.openxmlformats.org/drawingml/2006/main">
-            <a:r>
-              <a:rPr sz="1400"/>
-              <a:t>Antwoordmodel: https://github.com/meijer1973/4veco-lessen/blob/e734532a42b27732ac25ce990fc9448b12309d28/edities/books34-v3/books/book-4/chapters/4.3/Antwoorden.md</a:t>
-            </a:r>
-          </a:p>
-          <a:p xmlns:a="http://schemas.openxmlformats.org/drawingml/2006/main">
-            <a:r>
-              <a:rPr sz="1400"/>
-              <a:t>Docenteninformatie: https://github.com/meijer1973/4veco-lessen/blob/e734532a42b27732ac25ce990fc9448b12309d28/edities/books34-v3/books/book-4/chapters/4.3/Docenteninformatie.md</a:t>
+              <a:t>Bron: Boek 4, books34-v3, broncommit 0356afb6cac2dd43adbe9f63b872aaf423efc914. Gedrukte boekpagina 150: start. Opgave 40: bronnen p.152 en vragen p.153. https://github.com/meijer1973/4veco-lessen/blob/0356afb6cac2dd43adbe9f63b872aaf423efc914/edities/books34-v3/books/book-4/output/Boek_4_Compleet_v3.pdf</a:t>
+            </a:r>
+          </a:p>
+          <a:p xmlns:a="http://schemas.openxmlformats.org/drawingml/2006/main">
+            <a:r>
+              <a:rPr sz="1400"/>
+              <a:t>Manuscript: https://github.com/meijer1973/4veco-lessen/blob/0356afb6cac2dd43adbe9f63b872aaf423efc914/edities/books34-v3/books/book-4/chapters/4.3/4.3.5%20manuscript.md</a:t>
+            </a:r>
+          </a:p>
+          <a:p xmlns:a="http://schemas.openxmlformats.org/drawingml/2006/main">
+            <a:r>
+              <a:rPr sz="1400"/>
+              <a:t>Antwoordmodel: https://github.com/meijer1973/4veco-lessen/blob/0356afb6cac2dd43adbe9f63b872aaf423efc914/edities/books34-v3/books/book-4/chapters/4.3/Antwoorden.md</a:t>
+            </a:r>
+          </a:p>
+          <a:p xmlns:a="http://schemas.openxmlformats.org/drawingml/2006/main">
+            <a:r>
+              <a:rPr sz="1400"/>
+              <a:t>Docenteninformatie: https://github.com/meijer1973/4veco-lessen/blob/0356afb6cac2dd43adbe9f63b872aaf423efc914/edities/books34-v3/books/book-4/chapters/4.3/Docenteninformatie.md</a:t>
             </a:r>
           </a:p>
           <a:p xmlns:a="http://schemas.openxmlformats.org/drawingml/2006/main">
@@ -2369,25 +2369,25 @@
           <a:p xmlns:a="http://schemas.openxmlformats.org/drawingml/2006/main">
             <a:r>
               <a:rPr sz="1400"/>
-              <a:t>Bron: Boek 4, books34-v3, broncommit e734532a42b27732ac25ce990fc9448b12309d28. Methode: §4.3.1, gedrukte boekpagina’s 115–118. https://github.com/meijer1973/4veco-lessen/blob/e734532a42b27732ac25ce990fc9448b12309d28/edities/books34-v3/books/book-4/output/Boek_4_Compleet_v3.pdf</a:t>
-            </a:r>
-          </a:p>
-          <a:p xmlns:a="http://schemas.openxmlformats.org/drawingml/2006/main">
-            <a:r>
-              <a:rPr sz="1400"/>
-              <a:t>Manuscript: https://github.com/meijer1973/4veco-lessen/blob/e734532a42b27732ac25ce990fc9448b12309d28/edities/books34-v3/books/book-4/chapters/4.3/4.3.5%20manuscript.md</a:t>
-            </a:r>
-          </a:p>
-          <a:p xmlns:a="http://schemas.openxmlformats.org/drawingml/2006/main">
-            <a:r>
-              <a:rPr sz="1400"/>
-              <a:t>Antwoordmodel: https://github.com/meijer1973/4veco-lessen/blob/e734532a42b27732ac25ce990fc9448b12309d28/edities/books34-v3/books/book-4/chapters/4.3/Antwoorden.md</a:t>
-            </a:r>
-          </a:p>
-          <a:p xmlns:a="http://schemas.openxmlformats.org/drawingml/2006/main">
-            <a:r>
-              <a:rPr sz="1400"/>
-              <a:t>Docenteninformatie: https://github.com/meijer1973/4veco-lessen/blob/e734532a42b27732ac25ce990fc9448b12309d28/edities/books34-v3/books/book-4/chapters/4.3/Docenteninformatie.md</a:t>
+              <a:t>Bron: Boek 4, books34-v3, broncommit 0356afb6cac2dd43adbe9f63b872aaf423efc914. Methode: §4.3.1, gedrukte boekpagina’s 115–118. https://github.com/meijer1973/4veco-lessen/blob/0356afb6cac2dd43adbe9f63b872aaf423efc914/edities/books34-v3/books/book-4/output/Boek_4_Compleet_v3.pdf</a:t>
+            </a:r>
+          </a:p>
+          <a:p xmlns:a="http://schemas.openxmlformats.org/drawingml/2006/main">
+            <a:r>
+              <a:rPr sz="1400"/>
+              <a:t>Manuscript: https://github.com/meijer1973/4veco-lessen/blob/0356afb6cac2dd43adbe9f63b872aaf423efc914/edities/books34-v3/books/book-4/chapters/4.3/4.3.5%20manuscript.md</a:t>
+            </a:r>
+          </a:p>
+          <a:p xmlns:a="http://schemas.openxmlformats.org/drawingml/2006/main">
+            <a:r>
+              <a:rPr sz="1400"/>
+              <a:t>Antwoordmodel: https://github.com/meijer1973/4veco-lessen/blob/0356afb6cac2dd43adbe9f63b872aaf423efc914/edities/books34-v3/books/book-4/chapters/4.3/Antwoorden.md</a:t>
+            </a:r>
+          </a:p>
+          <a:p xmlns:a="http://schemas.openxmlformats.org/drawingml/2006/main">
+            <a:r>
+              <a:rPr sz="1400"/>
+              <a:t>Docenteninformatie: https://github.com/meijer1973/4veco-lessen/blob/0356afb6cac2dd43adbe9f63b872aaf423efc914/edities/books34-v3/books/book-4/chapters/4.3/Docenteninformatie.md</a:t>
             </a:r>
           </a:p>
           <a:p xmlns:a="http://schemas.openxmlformats.org/drawingml/2006/main">
@@ -2512,25 +2512,25 @@
           <a:p xmlns:a="http://schemas.openxmlformats.org/drawingml/2006/main">
             <a:r>
               <a:rPr sz="1400"/>
-              <a:t>Bron: Boek 4, books34-v3, broncommit e734532a42b27732ac25ce990fc9448b12309d28. §4.3.4, gedrukte boekpagina’s 141–144. https://github.com/meijer1973/4veco-lessen/blob/e734532a42b27732ac25ce990fc9448b12309d28/edities/books34-v3/books/book-4/output/Boek_4_Compleet_v3.pdf</a:t>
-            </a:r>
-          </a:p>
-          <a:p xmlns:a="http://schemas.openxmlformats.org/drawingml/2006/main">
-            <a:r>
-              <a:rPr sz="1400"/>
-              <a:t>Manuscript: https://github.com/meijer1973/4veco-lessen/blob/e734532a42b27732ac25ce990fc9448b12309d28/edities/books34-v3/books/book-4/chapters/4.3/4.3.5%20manuscript.md</a:t>
-            </a:r>
-          </a:p>
-          <a:p xmlns:a="http://schemas.openxmlformats.org/drawingml/2006/main">
-            <a:r>
-              <a:rPr sz="1400"/>
-              <a:t>Antwoordmodel: https://github.com/meijer1973/4veco-lessen/blob/e734532a42b27732ac25ce990fc9448b12309d28/edities/books34-v3/books/book-4/chapters/4.3/Antwoorden.md</a:t>
-            </a:r>
-          </a:p>
-          <a:p xmlns:a="http://schemas.openxmlformats.org/drawingml/2006/main">
-            <a:r>
-              <a:rPr sz="1400"/>
-              <a:t>Docenteninformatie: https://github.com/meijer1973/4veco-lessen/blob/e734532a42b27732ac25ce990fc9448b12309d28/edities/books34-v3/books/book-4/chapters/4.3/Docenteninformatie.md</a:t>
+              <a:t>Bron: Boek 4, books34-v3, broncommit 0356afb6cac2dd43adbe9f63b872aaf423efc914. §4.3.4, gedrukte boekpagina’s 141–144. https://github.com/meijer1973/4veco-lessen/blob/0356afb6cac2dd43adbe9f63b872aaf423efc914/edities/books34-v3/books/book-4/output/Boek_4_Compleet_v3.pdf</a:t>
+            </a:r>
+          </a:p>
+          <a:p xmlns:a="http://schemas.openxmlformats.org/drawingml/2006/main">
+            <a:r>
+              <a:rPr sz="1400"/>
+              <a:t>Manuscript: https://github.com/meijer1973/4veco-lessen/blob/0356afb6cac2dd43adbe9f63b872aaf423efc914/edities/books34-v3/books/book-4/chapters/4.3/4.3.5%20manuscript.md</a:t>
+            </a:r>
+          </a:p>
+          <a:p xmlns:a="http://schemas.openxmlformats.org/drawingml/2006/main">
+            <a:r>
+              <a:rPr sz="1400"/>
+              <a:t>Antwoordmodel: https://github.com/meijer1973/4veco-lessen/blob/0356afb6cac2dd43adbe9f63b872aaf423efc914/edities/books34-v3/books/book-4/chapters/4.3/Antwoorden.md</a:t>
+            </a:r>
+          </a:p>
+          <a:p xmlns:a="http://schemas.openxmlformats.org/drawingml/2006/main">
+            <a:r>
+              <a:rPr sz="1400"/>
+              <a:t>Docenteninformatie: https://github.com/meijer1973/4veco-lessen/blob/0356afb6cac2dd43adbe9f63b872aaf423efc914/edities/books34-v3/books/book-4/chapters/4.3/Docenteninformatie.md</a:t>
             </a:r>
           </a:p>
           <a:p xmlns:a="http://schemas.openxmlformats.org/drawingml/2006/main">
@@ -2655,25 +2655,25 @@
           <a:p xmlns:a="http://schemas.openxmlformats.org/drawingml/2006/main">
             <a:r>
               <a:rPr sz="1400"/>
-              <a:t>Bron: Boek 4, books34-v3, broncommit e734532a42b27732ac25ce990fc9448b12309d28. Gedrukte boekpagina 150: start. Opgave 40: bronnen p.152 en vragen p.153. https://github.com/meijer1973/4veco-lessen/blob/e734532a42b27732ac25ce990fc9448b12309d28/edities/books34-v3/books/book-4/output/Boek_4_Compleet_v3.pdf</a:t>
-            </a:r>
-          </a:p>
-          <a:p xmlns:a="http://schemas.openxmlformats.org/drawingml/2006/main">
-            <a:r>
-              <a:rPr sz="1400"/>
-              <a:t>Manuscript: https://github.com/meijer1973/4veco-lessen/blob/e734532a42b27732ac25ce990fc9448b12309d28/edities/books34-v3/books/book-4/chapters/4.3/4.3.5%20manuscript.md</a:t>
-            </a:r>
-          </a:p>
-          <a:p xmlns:a="http://schemas.openxmlformats.org/drawingml/2006/main">
-            <a:r>
-              <a:rPr sz="1400"/>
-              <a:t>Antwoordmodel: https://github.com/meijer1973/4veco-lessen/blob/e734532a42b27732ac25ce990fc9448b12309d28/edities/books34-v3/books/book-4/chapters/4.3/Antwoorden.md</a:t>
-            </a:r>
-          </a:p>
-          <a:p xmlns:a="http://schemas.openxmlformats.org/drawingml/2006/main">
-            <a:r>
-              <a:rPr sz="1400"/>
-              <a:t>Docenteninformatie: https://github.com/meijer1973/4veco-lessen/blob/e734532a42b27732ac25ce990fc9448b12309d28/edities/books34-v3/books/book-4/chapters/4.3/Docenteninformatie.md</a:t>
+              <a:t>Bron: Boek 4, books34-v3, broncommit 0356afb6cac2dd43adbe9f63b872aaf423efc914. Gedrukte boekpagina 150: start. Opgave 40: bronnen p.152 en vragen p.153. https://github.com/meijer1973/4veco-lessen/blob/0356afb6cac2dd43adbe9f63b872aaf423efc914/edities/books34-v3/books/book-4/output/Boek_4_Compleet_v3.pdf</a:t>
+            </a:r>
+          </a:p>
+          <a:p xmlns:a="http://schemas.openxmlformats.org/drawingml/2006/main">
+            <a:r>
+              <a:rPr sz="1400"/>
+              <a:t>Manuscript: https://github.com/meijer1973/4veco-lessen/blob/0356afb6cac2dd43adbe9f63b872aaf423efc914/edities/books34-v3/books/book-4/chapters/4.3/4.3.5%20manuscript.md</a:t>
+            </a:r>
+          </a:p>
+          <a:p xmlns:a="http://schemas.openxmlformats.org/drawingml/2006/main">
+            <a:r>
+              <a:rPr sz="1400"/>
+              <a:t>Antwoordmodel: https://github.com/meijer1973/4veco-lessen/blob/0356afb6cac2dd43adbe9f63b872aaf423efc914/edities/books34-v3/books/book-4/chapters/4.3/Antwoorden.md</a:t>
+            </a:r>
+          </a:p>
+          <a:p xmlns:a="http://schemas.openxmlformats.org/drawingml/2006/main">
+            <a:r>
+              <a:rPr sz="1400"/>
+              <a:t>Docenteninformatie: https://github.com/meijer1973/4veco-lessen/blob/0356afb6cac2dd43adbe9f63b872aaf423efc914/edities/books34-v3/books/book-4/chapters/4.3/Docenteninformatie.md</a:t>
             </a:r>
           </a:p>
           <a:p xmlns:a="http://schemas.openxmlformats.org/drawingml/2006/main">
@@ -2798,25 +2798,25 @@
           <a:p xmlns:a="http://schemas.openxmlformats.org/drawingml/2006/main">
             <a:r>
               <a:rPr sz="1400"/>
-              <a:t>Bron: Boek 4, books34-v3, broncommit e734532a42b27732ac25ce990fc9448b12309d28. Gedrukte boekpagina’s 152–153 (hoofdstukpagina’s 40–41). https://github.com/meijer1973/4veco-lessen/blob/e734532a42b27732ac25ce990fc9448b12309d28/edities/books34-v3/books/book-4/output/Boek_4_Compleet_v3.pdf</a:t>
-            </a:r>
-          </a:p>
-          <a:p xmlns:a="http://schemas.openxmlformats.org/drawingml/2006/main">
-            <a:r>
-              <a:rPr sz="1400"/>
-              <a:t>Manuscript: https://github.com/meijer1973/4veco-lessen/blob/e734532a42b27732ac25ce990fc9448b12309d28/edities/books34-v3/books/book-4/chapters/4.3/4.3.5%20manuscript.md</a:t>
-            </a:r>
-          </a:p>
-          <a:p xmlns:a="http://schemas.openxmlformats.org/drawingml/2006/main">
-            <a:r>
-              <a:rPr sz="1400"/>
-              <a:t>Antwoordmodel: https://github.com/meijer1973/4veco-lessen/blob/e734532a42b27732ac25ce990fc9448b12309d28/edities/books34-v3/books/book-4/chapters/4.3/Antwoorden.md</a:t>
-            </a:r>
-          </a:p>
-          <a:p xmlns:a="http://schemas.openxmlformats.org/drawingml/2006/main">
-            <a:r>
-              <a:rPr sz="1400"/>
-              <a:t>Docenteninformatie: https://github.com/meijer1973/4veco-lessen/blob/e734532a42b27732ac25ce990fc9448b12309d28/edities/books34-v3/books/book-4/chapters/4.3/Docenteninformatie.md</a:t>
+              <a:t>Bron: Boek 4, books34-v3, broncommit 0356afb6cac2dd43adbe9f63b872aaf423efc914. Gedrukte boekpagina’s 152–153 (hoofdstukpagina’s 40–41). https://github.com/meijer1973/4veco-lessen/blob/0356afb6cac2dd43adbe9f63b872aaf423efc914/edities/books34-v3/books/book-4/output/Boek_4_Compleet_v3.pdf</a:t>
+            </a:r>
+          </a:p>
+          <a:p xmlns:a="http://schemas.openxmlformats.org/drawingml/2006/main">
+            <a:r>
+              <a:rPr sz="1400"/>
+              <a:t>Manuscript: https://github.com/meijer1973/4veco-lessen/blob/0356afb6cac2dd43adbe9f63b872aaf423efc914/edities/books34-v3/books/book-4/chapters/4.3/4.3.5%20manuscript.md</a:t>
+            </a:r>
+          </a:p>
+          <a:p xmlns:a="http://schemas.openxmlformats.org/drawingml/2006/main">
+            <a:r>
+              <a:rPr sz="1400"/>
+              <a:t>Antwoordmodel: https://github.com/meijer1973/4veco-lessen/blob/0356afb6cac2dd43adbe9f63b872aaf423efc914/edities/books34-v3/books/book-4/chapters/4.3/Antwoorden.md</a:t>
+            </a:r>
+          </a:p>
+          <a:p xmlns:a="http://schemas.openxmlformats.org/drawingml/2006/main">
+            <a:r>
+              <a:rPr sz="1400"/>
+              <a:t>Docenteninformatie: https://github.com/meijer1973/4veco-lessen/blob/0356afb6cac2dd43adbe9f63b872aaf423efc914/edities/books34-v3/books/book-4/chapters/4.3/Docenteninformatie.md</a:t>
             </a:r>
           </a:p>
           <a:p xmlns:a="http://schemas.openxmlformats.org/drawingml/2006/main">
@@ -2941,25 +2941,25 @@
           <a:p xmlns:a="http://schemas.openxmlformats.org/drawingml/2006/main">
             <a:r>
               <a:rPr sz="1400"/>
-              <a:t>Bron: Boek 4, books34-v3, broncommit e734532a42b27732ac25ce990fc9448b12309d28. Gedrukte boekpagina’s 152–153 (hoofdstukpagina’s 40–41). https://github.com/meijer1973/4veco-lessen/blob/e734532a42b27732ac25ce990fc9448b12309d28/edities/books34-v3/books/book-4/output/Boek_4_Compleet_v3.pdf</a:t>
-            </a:r>
-          </a:p>
-          <a:p xmlns:a="http://schemas.openxmlformats.org/drawingml/2006/main">
-            <a:r>
-              <a:rPr sz="1400"/>
-              <a:t>Manuscript: https://github.com/meijer1973/4veco-lessen/blob/e734532a42b27732ac25ce990fc9448b12309d28/edities/books34-v3/books/book-4/chapters/4.3/4.3.5%20manuscript.md</a:t>
-            </a:r>
-          </a:p>
-          <a:p xmlns:a="http://schemas.openxmlformats.org/drawingml/2006/main">
-            <a:r>
-              <a:rPr sz="1400"/>
-              <a:t>Antwoordmodel: https://github.com/meijer1973/4veco-lessen/blob/e734532a42b27732ac25ce990fc9448b12309d28/edities/books34-v3/books/book-4/chapters/4.3/Antwoorden.md</a:t>
-            </a:r>
-          </a:p>
-          <a:p xmlns:a="http://schemas.openxmlformats.org/drawingml/2006/main">
-            <a:r>
-              <a:rPr sz="1400"/>
-              <a:t>Docenteninformatie: https://github.com/meijer1973/4veco-lessen/blob/e734532a42b27732ac25ce990fc9448b12309d28/edities/books34-v3/books/book-4/chapters/4.3/Docenteninformatie.md</a:t>
+              <a:t>Bron: Boek 4, books34-v3, broncommit 0356afb6cac2dd43adbe9f63b872aaf423efc914. Gedrukte boekpagina’s 152–153 (hoofdstukpagina’s 40–41). https://github.com/meijer1973/4veco-lessen/blob/0356afb6cac2dd43adbe9f63b872aaf423efc914/edities/books34-v3/books/book-4/output/Boek_4_Compleet_v3.pdf</a:t>
+            </a:r>
+          </a:p>
+          <a:p xmlns:a="http://schemas.openxmlformats.org/drawingml/2006/main">
+            <a:r>
+              <a:rPr sz="1400"/>
+              <a:t>Manuscript: https://github.com/meijer1973/4veco-lessen/blob/0356afb6cac2dd43adbe9f63b872aaf423efc914/edities/books34-v3/books/book-4/chapters/4.3/4.3.5%20manuscript.md</a:t>
+            </a:r>
+          </a:p>
+          <a:p xmlns:a="http://schemas.openxmlformats.org/drawingml/2006/main">
+            <a:r>
+              <a:rPr sz="1400"/>
+              <a:t>Antwoordmodel: https://github.com/meijer1973/4veco-lessen/blob/0356afb6cac2dd43adbe9f63b872aaf423efc914/edities/books34-v3/books/book-4/chapters/4.3/Antwoorden.md</a:t>
+            </a:r>
+          </a:p>
+          <a:p xmlns:a="http://schemas.openxmlformats.org/drawingml/2006/main">
+            <a:r>
+              <a:rPr sz="1400"/>
+              <a:t>Docenteninformatie: https://github.com/meijer1973/4veco-lessen/blob/0356afb6cac2dd43adbe9f63b872aaf423efc914/edities/books34-v3/books/book-4/chapters/4.3/Docenteninformatie.md</a:t>
             </a:r>
           </a:p>
           <a:p xmlns:a="http://schemas.openxmlformats.org/drawingml/2006/main">
@@ -3048,7 +3048,7 @@
           <a:p xmlns:a="http://schemas.openxmlformats.org/drawingml/2006/main">
             <a:r>
               <a:rPr sz="1400"/>
-              <a:t>Uitleg: Oorspronkelijke figuur 24 ongewijzigd overgenomen uit mixed_base.svg. De verschuiving is gegeven; de evenwichten zijn nog niet gemarkeerd. Bronbevinding 435-S2: de boekfiguur tekent lijnen door buiten de expliciete geldigheid €4–€24. Benoem daarom de geldigheidsgrens op de dia. De latere bewerkbare antwoordgrafiek toont alleen de geldige lijnstukken en markeert beide evenwichten. De bron zelf is niet gewijzigd.</a:t>
+              <a:t>Uitleg: Actuele figuur 24 overgenomen uit mixed_base.svg, met lijnstukken binnen de modelgrenzen. De verschuiving is gegeven; de evenwichten zijn nog niet gemarkeerd. De boekfiguur en de latere bewerkbare antwoordgrafiek gebruiken hetzelfde geldige bereik €4–€24. Benoem de modelgrenzen op de dia; de antwoordgrafiek markeert daarna beide evenwichten.</a:t>
             </a:r>
           </a:p>
           <a:p xmlns:a="http://schemas.openxmlformats.org/drawingml/2006/main">
@@ -3084,25 +3084,25 @@
           <a:p xmlns:a="http://schemas.openxmlformats.org/drawingml/2006/main">
             <a:r>
               <a:rPr sz="1400"/>
-              <a:t>Bron: Boek 4, books34-v3, broncommit e734532a42b27732ac25ce990fc9448b12309d28. Gedrukte boekpagina’s 152–153 (hoofdstukpagina’s 40–41). https://github.com/meijer1973/4veco-lessen/blob/e734532a42b27732ac25ce990fc9448b12309d28/edities/books34-v3/books/book-4/output/Boek_4_Compleet_v3.pdf</a:t>
-            </a:r>
-          </a:p>
-          <a:p xmlns:a="http://schemas.openxmlformats.org/drawingml/2006/main">
-            <a:r>
-              <a:rPr sz="1400"/>
-              <a:t>Manuscript: https://github.com/meijer1973/4veco-lessen/blob/e734532a42b27732ac25ce990fc9448b12309d28/edities/books34-v3/books/book-4/chapters/4.3/4.3.5%20manuscript.md</a:t>
-            </a:r>
-          </a:p>
-          <a:p xmlns:a="http://schemas.openxmlformats.org/drawingml/2006/main">
-            <a:r>
-              <a:rPr sz="1400"/>
-              <a:t>Antwoordmodel: https://github.com/meijer1973/4veco-lessen/blob/e734532a42b27732ac25ce990fc9448b12309d28/edities/books34-v3/books/book-4/chapters/4.3/Antwoorden.md</a:t>
-            </a:r>
-          </a:p>
-          <a:p xmlns:a="http://schemas.openxmlformats.org/drawingml/2006/main">
-            <a:r>
-              <a:rPr sz="1400"/>
-              <a:t>Docenteninformatie: https://github.com/meijer1973/4veco-lessen/blob/e734532a42b27732ac25ce990fc9448b12309d28/edities/books34-v3/books/book-4/chapters/4.3/Docenteninformatie.md</a:t>
+              <a:t>Bron: Boek 4, books34-v3, broncommit 0356afb6cac2dd43adbe9f63b872aaf423efc914. Gedrukte boekpagina’s 152–153 (hoofdstukpagina’s 40–41). https://github.com/meijer1973/4veco-lessen/blob/0356afb6cac2dd43adbe9f63b872aaf423efc914/edities/books34-v3/books/book-4/output/Boek_4_Compleet_v3.pdf</a:t>
+            </a:r>
+          </a:p>
+          <a:p xmlns:a="http://schemas.openxmlformats.org/drawingml/2006/main">
+            <a:r>
+              <a:rPr sz="1400"/>
+              <a:t>Manuscript: https://github.com/meijer1973/4veco-lessen/blob/0356afb6cac2dd43adbe9f63b872aaf423efc914/edities/books34-v3/books/book-4/chapters/4.3/4.3.5%20manuscript.md</a:t>
+            </a:r>
+          </a:p>
+          <a:p xmlns:a="http://schemas.openxmlformats.org/drawingml/2006/main">
+            <a:r>
+              <a:rPr sz="1400"/>
+              <a:t>Antwoordmodel: https://github.com/meijer1973/4veco-lessen/blob/0356afb6cac2dd43adbe9f63b872aaf423efc914/edities/books34-v3/books/book-4/chapters/4.3/Antwoorden.md</a:t>
+            </a:r>
+          </a:p>
+          <a:p xmlns:a="http://schemas.openxmlformats.org/drawingml/2006/main">
+            <a:r>
+              <a:rPr sz="1400"/>
+              <a:t>Docenteninformatie: https://github.com/meijer1973/4veco-lessen/blob/0356afb6cac2dd43adbe9f63b872aaf423efc914/edities/books34-v3/books/book-4/chapters/4.3/Docenteninformatie.md</a:t>
             </a:r>
           </a:p>
           <a:p xmlns:a="http://schemas.openxmlformats.org/drawingml/2006/main">
@@ -3227,25 +3227,25 @@
           <a:p xmlns:a="http://schemas.openxmlformats.org/drawingml/2006/main">
             <a:r>
               <a:rPr sz="1400"/>
-              <a:t>Bron: Boek 4, books34-v3, broncommit e734532a42b27732ac25ce990fc9448b12309d28. Gedrukte boekpagina’s 152–153 (hoofdstukpagina’s 40–41). https://github.com/meijer1973/4veco-lessen/blob/e734532a42b27732ac25ce990fc9448b12309d28/edities/books34-v3/books/book-4/output/Boek_4_Compleet_v3.pdf</a:t>
-            </a:r>
-          </a:p>
-          <a:p xmlns:a="http://schemas.openxmlformats.org/drawingml/2006/main">
-            <a:r>
-              <a:rPr sz="1400"/>
-              <a:t>Manuscript: https://github.com/meijer1973/4veco-lessen/blob/e734532a42b27732ac25ce990fc9448b12309d28/edities/books34-v3/books/book-4/chapters/4.3/4.3.5%20manuscript.md</a:t>
-            </a:r>
-          </a:p>
-          <a:p xmlns:a="http://schemas.openxmlformats.org/drawingml/2006/main">
-            <a:r>
-              <a:rPr sz="1400"/>
-              <a:t>Antwoordmodel: https://github.com/meijer1973/4veco-lessen/blob/e734532a42b27732ac25ce990fc9448b12309d28/edities/books34-v3/books/book-4/chapters/4.3/Antwoorden.md</a:t>
-            </a:r>
-          </a:p>
-          <a:p xmlns:a="http://schemas.openxmlformats.org/drawingml/2006/main">
-            <a:r>
-              <a:rPr sz="1400"/>
-              <a:t>Docenteninformatie: https://github.com/meijer1973/4veco-lessen/blob/e734532a42b27732ac25ce990fc9448b12309d28/edities/books34-v3/books/book-4/chapters/4.3/Docenteninformatie.md</a:t>
+              <a:t>Bron: Boek 4, books34-v3, broncommit 0356afb6cac2dd43adbe9f63b872aaf423efc914. Gedrukte boekpagina’s 152–153 (hoofdstukpagina’s 40–41). https://github.com/meijer1973/4veco-lessen/blob/0356afb6cac2dd43adbe9f63b872aaf423efc914/edities/books34-v3/books/book-4/output/Boek_4_Compleet_v3.pdf</a:t>
+            </a:r>
+          </a:p>
+          <a:p xmlns:a="http://schemas.openxmlformats.org/drawingml/2006/main">
+            <a:r>
+              <a:rPr sz="1400"/>
+              <a:t>Manuscript: https://github.com/meijer1973/4veco-lessen/blob/0356afb6cac2dd43adbe9f63b872aaf423efc914/edities/books34-v3/books/book-4/chapters/4.3/4.3.5%20manuscript.md</a:t>
+            </a:r>
+          </a:p>
+          <a:p xmlns:a="http://schemas.openxmlformats.org/drawingml/2006/main">
+            <a:r>
+              <a:rPr sz="1400"/>
+              <a:t>Antwoordmodel: https://github.com/meijer1973/4veco-lessen/blob/0356afb6cac2dd43adbe9f63b872aaf423efc914/edities/books34-v3/books/book-4/chapters/4.3/Antwoorden.md</a:t>
+            </a:r>
+          </a:p>
+          <a:p xmlns:a="http://schemas.openxmlformats.org/drawingml/2006/main">
+            <a:r>
+              <a:rPr sz="1400"/>
+              <a:t>Docenteninformatie: https://github.com/meijer1973/4veco-lessen/blob/0356afb6cac2dd43adbe9f63b872aaf423efc914/edities/books34-v3/books/book-4/chapters/4.3/Docenteninformatie.md</a:t>
             </a:r>
           </a:p>
           <a:p xmlns:a="http://schemas.openxmlformats.org/drawingml/2006/main">
